--- a/template.pptx
+++ b/template.pptx
@@ -134,6 +134,90 @@
     <c:autoTitleDeleted val="1"/>
     <c:plotArea>
       <c:layout/>
+      <c:areaChart>
+        <c:grouping val="standard"/>
+        <c:varyColors val="0"/>
+        <c:ser>
+          <c:idx val="2"/>
+          <c:order val="2"/>
+          <c:tx>
+            <c:strRef>
+              <c:f>Sheet1!$D$1</c:f>
+              <c:strCache>
+                <c:ptCount val="1"/>
+                <c:pt idx="0">
+                  <c:v>系列 3</c:v>
+                </c:pt>
+              </c:strCache>
+            </c:strRef>
+          </c:tx>
+          <c:spPr>
+            <a:solidFill>
+              <a:schemeClr val="accent3"/>
+            </a:solidFill>
+            <a:ln>
+              <a:noFill/>
+            </a:ln>
+            <a:effectLst/>
+          </c:spPr>
+          <c:cat>
+            <c:strRef>
+              <c:f>Sheet1!$A$2:$A$5</c:f>
+              <c:strCache>
+                <c:ptCount val="4"/>
+                <c:pt idx="0">
+                  <c:v>カテゴリ 1</c:v>
+                </c:pt>
+                <c:pt idx="1">
+                  <c:v>カテゴリ 2</c:v>
+                </c:pt>
+                <c:pt idx="2">
+                  <c:v>カテゴリ 3</c:v>
+                </c:pt>
+                <c:pt idx="3">
+                  <c:v>カテゴリ 4</c:v>
+                </c:pt>
+              </c:strCache>
+            </c:strRef>
+          </c:cat>
+          <c:val>
+            <c:numRef>
+              <c:f>Sheet1!$D$2:$D$5</c:f>
+              <c:numCache>
+                <c:formatCode>General</c:formatCode>
+                <c:ptCount val="4"/>
+                <c:pt idx="0">
+                  <c:v>2</c:v>
+                </c:pt>
+                <c:pt idx="1">
+                  <c:v>2</c:v>
+                </c:pt>
+                <c:pt idx="2">
+                  <c:v>3</c:v>
+                </c:pt>
+                <c:pt idx="3">
+                  <c:v>5</c:v>
+                </c:pt>
+              </c:numCache>
+            </c:numRef>
+          </c:val>
+          <c:extLst>
+            <c:ext xmlns:c16="http://schemas.microsoft.com/office/drawing/2014/chart" uri="{C3380CC4-5D6E-409C-BE32-E72D297353CC}">
+              <c16:uniqueId val="{00000002-433F-C749-8D1A-3AE5D81B72E8}"/>
+            </c:ext>
+          </c:extLst>
+        </c:ser>
+        <c:dLbls>
+          <c:showLegendKey val="0"/>
+          <c:showVal val="0"/>
+          <c:showCatName val="0"/>
+          <c:showSerName val="0"/>
+          <c:showPercent val="0"/>
+          <c:showBubbleSize val="0"/>
+        </c:dLbls>
+        <c:axId val="985083905"/>
+        <c:axId val="985085617"/>
+      </c:areaChart>
       <c:lineChart>
         <c:grouping val="standard"/>
         <c:varyColors val="0"/>
@@ -285,80 +369,6 @@
             </c:ext>
           </c:extLst>
         </c:ser>
-        <c:ser>
-          <c:idx val="2"/>
-          <c:order val="2"/>
-          <c:tx>
-            <c:strRef>
-              <c:f>Sheet1!$D$1</c:f>
-              <c:strCache>
-                <c:ptCount val="1"/>
-                <c:pt idx="0">
-                  <c:v>系列 3</c:v>
-                </c:pt>
-              </c:strCache>
-            </c:strRef>
-          </c:tx>
-          <c:spPr>
-            <a:ln w="28575" cap="rnd">
-              <a:solidFill>
-                <a:schemeClr val="accent3"/>
-              </a:solidFill>
-              <a:round/>
-            </a:ln>
-            <a:effectLst/>
-          </c:spPr>
-          <c:marker>
-            <c:symbol val="none"/>
-          </c:marker>
-          <c:cat>
-            <c:strRef>
-              <c:f>Sheet1!$A$2:$A$5</c:f>
-              <c:strCache>
-                <c:ptCount val="4"/>
-                <c:pt idx="0">
-                  <c:v>カテゴリ 1</c:v>
-                </c:pt>
-                <c:pt idx="1">
-                  <c:v>カテゴリ 2</c:v>
-                </c:pt>
-                <c:pt idx="2">
-                  <c:v>カテゴリ 3</c:v>
-                </c:pt>
-                <c:pt idx="3">
-                  <c:v>カテゴリ 4</c:v>
-                </c:pt>
-              </c:strCache>
-            </c:strRef>
-          </c:cat>
-          <c:val>
-            <c:numRef>
-              <c:f>Sheet1!$D$2:$D$5</c:f>
-              <c:numCache>
-                <c:formatCode>General</c:formatCode>
-                <c:ptCount val="4"/>
-                <c:pt idx="0">
-                  <c:v>2</c:v>
-                </c:pt>
-                <c:pt idx="1">
-                  <c:v>2</c:v>
-                </c:pt>
-                <c:pt idx="2">
-                  <c:v>3</c:v>
-                </c:pt>
-                <c:pt idx="3">
-                  <c:v>5</c:v>
-                </c:pt>
-              </c:numCache>
-            </c:numRef>
-          </c:val>
-          <c:smooth val="0"/>
-          <c:extLst>
-            <c:ext xmlns:c16="http://schemas.microsoft.com/office/drawing/2014/chart" uri="{C3380CC4-5D6E-409C-BE32-E72D297353CC}">
-              <c16:uniqueId val="{00000002-433F-C749-8D1A-3AE5D81B72E8}"/>
-            </c:ext>
-          </c:extLst>
-        </c:ser>
         <c:dLbls>
           <c:showLegendKey val="0"/>
           <c:showVal val="0"/>
@@ -478,6 +488,66 @@
         <c:crosses val="autoZero"/>
         <c:crossBetween val="between"/>
       </c:valAx>
+      <c:valAx>
+        <c:axId val="985085617"/>
+        <c:scaling>
+          <c:orientation val="minMax"/>
+        </c:scaling>
+        <c:delete val="0"/>
+        <c:axPos val="r"/>
+        <c:numFmt formatCode="General" sourceLinked="1"/>
+        <c:majorTickMark val="none"/>
+        <c:minorTickMark val="none"/>
+        <c:tickLblPos val="nextTo"/>
+        <c:spPr>
+          <a:noFill/>
+          <a:ln>
+            <a:noFill/>
+          </a:ln>
+          <a:effectLst/>
+        </c:spPr>
+        <c:txPr>
+          <a:bodyPr rot="-60000000" spcFirstLastPara="1" vertOverflow="ellipsis" vert="horz" wrap="square" anchor="ctr" anchorCtr="1"/>
+          <a:lstStyle/>
+          <a:p>
+            <a:pPr>
+              <a:defRPr sz="1197" b="0" i="0" u="none" strike="noStrike" kern="1200" baseline="0">
+                <a:solidFill>
+                  <a:schemeClr val="tx1">
+                    <a:lumMod val="65000"/>
+                    <a:lumOff val="35000"/>
+                  </a:schemeClr>
+                </a:solidFill>
+                <a:latin typeface="+mn-lt"/>
+                <a:ea typeface="+mn-ea"/>
+                <a:cs typeface="+mn-cs"/>
+              </a:defRPr>
+            </a:pPr>
+            <a:endParaRPr lang="ja-JP"/>
+          </a:p>
+        </c:txPr>
+        <c:crossAx val="985083905"/>
+        <c:crosses val="max"/>
+        <c:crossBetween val="between"/>
+      </c:valAx>
+      <c:catAx>
+        <c:axId val="985083905"/>
+        <c:scaling>
+          <c:orientation val="minMax"/>
+        </c:scaling>
+        <c:delete val="1"/>
+        <c:axPos val="b"/>
+        <c:numFmt formatCode="General" sourceLinked="1"/>
+        <c:majorTickMark val="none"/>
+        <c:minorTickMark val="none"/>
+        <c:tickLblPos val="none"/>
+        <c:crossAx val="985085617"/>
+        <c:crosses val="autoZero"/>
+        <c:auto val="1"/>
+        <c:lblAlgn val="ctr"/>
+        <c:lblOffset val="100"/>
+        <c:noMultiLvlLbl val="0"/>
+      </c:catAx>
       <c:spPr>
         <a:noFill/>
         <a:ln>
@@ -486,6 +556,30 @@
         <a:effectLst/>
       </c:spPr>
     </c:plotArea>
+    <c:legend>
+      <c:legendPos val="b"/>
+      <c:overlay val="0"/>
+      <c:txPr>
+        <a:bodyPr rot="0" spcFirstLastPara="1" vertOverflow="ellipsis" vert="horz" wrap="square" anchor="ctr" anchorCtr="1"/>
+        <a:lstStyle/>
+        <a:p>
+          <a:pPr>
+            <a:defRPr sz="1197" b="0" i="0" u="none" strike="noStrike" kern="1200" baseline="0">
+              <a:solidFill>
+                <a:schemeClr val="tx1">
+                  <a:lumMod val="65000"/>
+                  <a:lumOff val="35000"/>
+                </a:schemeClr>
+              </a:solidFill>
+              <a:latin typeface="+mn-lt"/>
+              <a:ea typeface="+mn-ea"/>
+              <a:cs typeface="+mn-cs"/>
+            </a:defRPr>
+          </a:pPr>
+          <a:endParaRPr lang="ja-JP"/>
+        </a:p>
+      </c:txPr>
+    </c:legend>
     <c:plotVisOnly val="1"/>
     <c:dispBlanksAs val="gap"/>
     <c:showDLblsOverMax val="0"/>
